--- a/cours/Module Recherche Documentaire/Département Anglais/Master 2 - DLE/Cours_Recherche_Documentaire_M2_DLE_01_EN.pptx
+++ b/cours/Module Recherche Documentaire/Département Anglais/Master 2 - DLE/Cours_Recherche_Documentaire_M2_DLE_01_EN.pptx
@@ -114,6 +114,1161 @@
     </a:lvl9pPr>
   </p:defaultTextStyle>
 </p:presentation>
+</file>
+
+<file path=ppt/notesMasters/notesMaster1.xml><?xml version="1.0" encoding="utf-8"?>
+<p:notesMaster xmlns:a="http://schemas.openxmlformats.org/drawingml/2006/main" xmlns:p="http://schemas.openxmlformats.org/presentationml/2006/main" xmlns:r="http://schemas.openxmlformats.org/officeDocument/2006/relationships">
+  <p:cSld>
+    <p:bg>
+      <p:bgRef idx="1001">
+        <a:schemeClr val="bg1"/>
+      </p:bgRef>
+    </p:bg>
+    <p:spTree>
+      <p:nvGrpSpPr>
+        <p:cNvPr id="1" name=""/>
+        <p:cNvGrpSpPr/>
+        <p:nvPr/>
+      </p:nvGrpSpPr>
+      <p:grpSpPr>
+        <a:xfrm>
+          <a:off x="0" y="0"/>
+          <a:ext cx="0" cy="0"/>
+          <a:chOff x="0" y="0"/>
+          <a:chExt cx="0" cy="0"/>
+        </a:xfrm>
+      </p:grpSpPr>
+      <p:sp>
+        <p:nvSpPr>
+          <p:cNvPr id="2" name="Header Placeholder 1"/>
+          <p:cNvSpPr>
+            <a:spLocks noGrp="1"/>
+          </p:cNvSpPr>
+          <p:nvPr>
+            <p:ph type="hdr" sz="quarter"/>
+          </p:nvPr>
+        </p:nvSpPr>
+        <p:spPr>
+          <a:xfrm>
+            <a:off x="0" y="0"/>
+            <a:ext cx="2971800" cy="457200"/>
+          </a:xfrm>
+          <a:prstGeom prst="rect">
+            <a:avLst/>
+          </a:prstGeom>
+        </p:spPr>
+        <p:txBody>
+          <a:bodyPr vert="horz" lIns="91440" tIns="45720" rIns="91440" bIns="45720" rtlCol="0"/>
+          <a:lstStyle>
+            <a:lvl1pPr algn="l">
+              <a:defRPr sz="1200"/>
+            </a:lvl1pPr>
+          </a:lstStyle>
+          <a:p>
+            <a:endParaRPr lang="en-US"/>
+          </a:p>
+        </p:txBody>
+      </p:sp>
+      <p:sp>
+        <p:nvSpPr>
+          <p:cNvPr id="3" name="Date Placeholder 2"/>
+          <p:cNvSpPr>
+            <a:spLocks noGrp="1"/>
+          </p:cNvSpPr>
+          <p:nvPr>
+            <p:ph type="dt" idx="1"/>
+          </p:nvPr>
+        </p:nvSpPr>
+        <p:spPr>
+          <a:xfrm>
+            <a:off x="3884613" y="0"/>
+            <a:ext cx="2971800" cy="457200"/>
+          </a:xfrm>
+          <a:prstGeom prst="rect">
+            <a:avLst/>
+          </a:prstGeom>
+        </p:spPr>
+        <p:txBody>
+          <a:bodyPr vert="horz" lIns="91440" tIns="45720" rIns="91440" bIns="45720" rtlCol="0"/>
+          <a:lstStyle>
+            <a:lvl1pPr algn="r">
+              <a:defRPr sz="1200"/>
+            </a:lvl1pPr>
+          </a:lstStyle>
+          <a:p>
+            <a:fld id="{0F89C1C7-3DCD-1040-A9CF-14679D8B5DDD}" type="datetimeFigureOut">
+              <a:rPr lang="en-US" smtClean="0"/>
+              <a:t>10/17/16</a:t>
+            </a:fld>
+            <a:endParaRPr lang="en-US"/>
+          </a:p>
+        </p:txBody>
+      </p:sp>
+      <p:sp>
+        <p:nvSpPr>
+          <p:cNvPr id="4" name="Slide Image Placeholder 3"/>
+          <p:cNvSpPr>
+            <a:spLocks noGrp="1" noRot="1" noChangeAspect="1"/>
+          </p:cNvSpPr>
+          <p:nvPr>
+            <p:ph type="sldImg" idx="2"/>
+          </p:nvPr>
+        </p:nvSpPr>
+        <p:spPr>
+          <a:xfrm>
+            <a:off x="1143000" y="685800"/>
+            <a:ext cx="4572000" cy="3429000"/>
+          </a:xfrm>
+          <a:prstGeom prst="rect">
+            <a:avLst/>
+          </a:prstGeom>
+          <a:noFill/>
+          <a:ln w="12700">
+            <a:solidFill>
+              <a:prstClr val="black"/>
+            </a:solidFill>
+          </a:ln>
+        </p:spPr>
+        <p:txBody>
+          <a:bodyPr vert="horz" lIns="91440" tIns="45720" rIns="91440" bIns="45720" rtlCol="0" anchor="ctr"/>
+          <a:lstStyle/>
+          <a:p>
+            <a:endParaRPr lang="en-US"/>
+          </a:p>
+        </p:txBody>
+      </p:sp>
+      <p:sp>
+        <p:nvSpPr>
+          <p:cNvPr id="5" name="Notes Placeholder 4"/>
+          <p:cNvSpPr>
+            <a:spLocks noGrp="1"/>
+          </p:cNvSpPr>
+          <p:nvPr>
+            <p:ph type="body" sz="quarter" idx="3"/>
+          </p:nvPr>
+        </p:nvSpPr>
+        <p:spPr>
+          <a:xfrm>
+            <a:off x="685800" y="4343400"/>
+            <a:ext cx="5486400" cy="4114800"/>
+          </a:xfrm>
+          <a:prstGeom prst="rect">
+            <a:avLst/>
+          </a:prstGeom>
+        </p:spPr>
+        <p:txBody>
+          <a:bodyPr vert="horz" lIns="91440" tIns="45720" rIns="91440" bIns="45720" rtlCol="0"/>
+          <a:lstStyle/>
+          <a:p>
+            <a:pPr lvl="0"/>
+            <a:r>
+              <a:rPr lang="en-US" smtClean="0"/>
+              <a:t>Click to edit Master text styles</a:t>
+            </a:r>
+          </a:p>
+          <a:p>
+            <a:pPr lvl="1"/>
+            <a:r>
+              <a:rPr lang="en-US" smtClean="0"/>
+              <a:t>Second level</a:t>
+            </a:r>
+          </a:p>
+          <a:p>
+            <a:pPr lvl="2"/>
+            <a:r>
+              <a:rPr lang="en-US" smtClean="0"/>
+              <a:t>Third level</a:t>
+            </a:r>
+          </a:p>
+          <a:p>
+            <a:pPr lvl="3"/>
+            <a:r>
+              <a:rPr lang="en-US" smtClean="0"/>
+              <a:t>Fourth level</a:t>
+            </a:r>
+          </a:p>
+          <a:p>
+            <a:pPr lvl="4"/>
+            <a:r>
+              <a:rPr lang="en-US" smtClean="0"/>
+              <a:t>Fifth level</a:t>
+            </a:r>
+            <a:endParaRPr lang="en-US"/>
+          </a:p>
+        </p:txBody>
+      </p:sp>
+      <p:sp>
+        <p:nvSpPr>
+          <p:cNvPr id="6" name="Footer Placeholder 5"/>
+          <p:cNvSpPr>
+            <a:spLocks noGrp="1"/>
+          </p:cNvSpPr>
+          <p:nvPr>
+            <p:ph type="ftr" sz="quarter" idx="4"/>
+          </p:nvPr>
+        </p:nvSpPr>
+        <p:spPr>
+          <a:xfrm>
+            <a:off x="0" y="8685213"/>
+            <a:ext cx="2971800" cy="457200"/>
+          </a:xfrm>
+          <a:prstGeom prst="rect">
+            <a:avLst/>
+          </a:prstGeom>
+        </p:spPr>
+        <p:txBody>
+          <a:bodyPr vert="horz" lIns="91440" tIns="45720" rIns="91440" bIns="45720" rtlCol="0" anchor="b"/>
+          <a:lstStyle>
+            <a:lvl1pPr algn="l">
+              <a:defRPr sz="1200"/>
+            </a:lvl1pPr>
+          </a:lstStyle>
+          <a:p>
+            <a:endParaRPr lang="en-US"/>
+          </a:p>
+        </p:txBody>
+      </p:sp>
+      <p:sp>
+        <p:nvSpPr>
+          <p:cNvPr id="7" name="Slide Number Placeholder 6"/>
+          <p:cNvSpPr>
+            <a:spLocks noGrp="1"/>
+          </p:cNvSpPr>
+          <p:nvPr>
+            <p:ph type="sldNum" sz="quarter" idx="5"/>
+          </p:nvPr>
+        </p:nvSpPr>
+        <p:spPr>
+          <a:xfrm>
+            <a:off x="3884613" y="8685213"/>
+            <a:ext cx="2971800" cy="457200"/>
+          </a:xfrm>
+          <a:prstGeom prst="rect">
+            <a:avLst/>
+          </a:prstGeom>
+        </p:spPr>
+        <p:txBody>
+          <a:bodyPr vert="horz" lIns="91440" tIns="45720" rIns="91440" bIns="45720" rtlCol="0" anchor="b"/>
+          <a:lstStyle>
+            <a:lvl1pPr algn="r">
+              <a:defRPr sz="1200"/>
+            </a:lvl1pPr>
+          </a:lstStyle>
+          <a:p>
+            <a:fld id="{BB5E49A5-4136-284D-997B-48E1D791AD67}" type="slidenum">
+              <a:rPr lang="en-US" smtClean="0"/>
+              <a:t>‹#›</a:t>
+            </a:fld>
+            <a:endParaRPr lang="en-US"/>
+          </a:p>
+        </p:txBody>
+      </p:sp>
+    </p:spTree>
+    <p:extLst>
+      <p:ext uri="{BB962C8B-B14F-4D97-AF65-F5344CB8AC3E}">
+        <p14:creationId xmlns:p14="http://schemas.microsoft.com/office/powerpoint/2010/main" val="2623252185"/>
+      </p:ext>
+    </p:extLst>
+  </p:cSld>
+  <p:clrMap bg1="lt1" tx1="dk1" bg2="lt2" tx2="dk2" accent1="accent1" accent2="accent2" accent3="accent3" accent4="accent4" accent5="accent5" accent6="accent6" hlink="hlink" folHlink="folHlink"/>
+  <p:notesStyle>
+    <a:lvl1pPr marL="0" algn="l" defTabSz="457200" rtl="0" eaLnBrk="1" latinLnBrk="0" hangingPunct="1">
+      <a:defRPr sz="1200" kern="1200">
+        <a:solidFill>
+          <a:schemeClr val="tx1"/>
+        </a:solidFill>
+        <a:latin typeface="+mn-lt"/>
+        <a:ea typeface="+mn-ea"/>
+        <a:cs typeface="+mn-cs"/>
+      </a:defRPr>
+    </a:lvl1pPr>
+    <a:lvl2pPr marL="457200" algn="l" defTabSz="457200" rtl="0" eaLnBrk="1" latinLnBrk="0" hangingPunct="1">
+      <a:defRPr sz="1200" kern="1200">
+        <a:solidFill>
+          <a:schemeClr val="tx1"/>
+        </a:solidFill>
+        <a:latin typeface="+mn-lt"/>
+        <a:ea typeface="+mn-ea"/>
+        <a:cs typeface="+mn-cs"/>
+      </a:defRPr>
+    </a:lvl2pPr>
+    <a:lvl3pPr marL="914400" algn="l" defTabSz="457200" rtl="0" eaLnBrk="1" latinLnBrk="0" hangingPunct="1">
+      <a:defRPr sz="1200" kern="1200">
+        <a:solidFill>
+          <a:schemeClr val="tx1"/>
+        </a:solidFill>
+        <a:latin typeface="+mn-lt"/>
+        <a:ea typeface="+mn-ea"/>
+        <a:cs typeface="+mn-cs"/>
+      </a:defRPr>
+    </a:lvl3pPr>
+    <a:lvl4pPr marL="1371600" algn="l" defTabSz="457200" rtl="0" eaLnBrk="1" latinLnBrk="0" hangingPunct="1">
+      <a:defRPr sz="1200" kern="1200">
+        <a:solidFill>
+          <a:schemeClr val="tx1"/>
+        </a:solidFill>
+        <a:latin typeface="+mn-lt"/>
+        <a:ea typeface="+mn-ea"/>
+        <a:cs typeface="+mn-cs"/>
+      </a:defRPr>
+    </a:lvl4pPr>
+    <a:lvl5pPr marL="1828800" algn="l" defTabSz="457200" rtl="0" eaLnBrk="1" latinLnBrk="0" hangingPunct="1">
+      <a:defRPr sz="1200" kern="1200">
+        <a:solidFill>
+          <a:schemeClr val="tx1"/>
+        </a:solidFill>
+        <a:latin typeface="+mn-lt"/>
+        <a:ea typeface="+mn-ea"/>
+        <a:cs typeface="+mn-cs"/>
+      </a:defRPr>
+    </a:lvl5pPr>
+    <a:lvl6pPr marL="2286000" algn="l" defTabSz="457200" rtl="0" eaLnBrk="1" latinLnBrk="0" hangingPunct="1">
+      <a:defRPr sz="1200" kern="1200">
+        <a:solidFill>
+          <a:schemeClr val="tx1"/>
+        </a:solidFill>
+        <a:latin typeface="+mn-lt"/>
+        <a:ea typeface="+mn-ea"/>
+        <a:cs typeface="+mn-cs"/>
+      </a:defRPr>
+    </a:lvl6pPr>
+    <a:lvl7pPr marL="2743200" algn="l" defTabSz="457200" rtl="0" eaLnBrk="1" latinLnBrk="0" hangingPunct="1">
+      <a:defRPr sz="1200" kern="1200">
+        <a:solidFill>
+          <a:schemeClr val="tx1"/>
+        </a:solidFill>
+        <a:latin typeface="+mn-lt"/>
+        <a:ea typeface="+mn-ea"/>
+        <a:cs typeface="+mn-cs"/>
+      </a:defRPr>
+    </a:lvl7pPr>
+    <a:lvl8pPr marL="3200400" algn="l" defTabSz="457200" rtl="0" eaLnBrk="1" latinLnBrk="0" hangingPunct="1">
+      <a:defRPr sz="1200" kern="1200">
+        <a:solidFill>
+          <a:schemeClr val="tx1"/>
+        </a:solidFill>
+        <a:latin typeface="+mn-lt"/>
+        <a:ea typeface="+mn-ea"/>
+        <a:cs typeface="+mn-cs"/>
+      </a:defRPr>
+    </a:lvl8pPr>
+    <a:lvl9pPr marL="3657600" algn="l" defTabSz="457200" rtl="0" eaLnBrk="1" latinLnBrk="0" hangingPunct="1">
+      <a:defRPr sz="1200" kern="1200">
+        <a:solidFill>
+          <a:schemeClr val="tx1"/>
+        </a:solidFill>
+        <a:latin typeface="+mn-lt"/>
+        <a:ea typeface="+mn-ea"/>
+        <a:cs typeface="+mn-cs"/>
+      </a:defRPr>
+    </a:lvl9pPr>
+  </p:notesStyle>
+</p:notesMaster>
+</file>
+
+<file path=ppt/notesSlides/notesSlide1.xml><?xml version="1.0" encoding="utf-8"?>
+<p:notes xmlns:a="http://schemas.openxmlformats.org/drawingml/2006/main" xmlns:p="http://schemas.openxmlformats.org/presentationml/2006/main" xmlns:r="http://schemas.openxmlformats.org/officeDocument/2006/relationships">
+  <p:cSld>
+    <p:spTree>
+      <p:nvGrpSpPr>
+        <p:cNvPr id="1" name=""/>
+        <p:cNvGrpSpPr/>
+        <p:nvPr/>
+      </p:nvGrpSpPr>
+      <p:grpSpPr>
+        <a:xfrm>
+          <a:off x="0" y="0"/>
+          <a:ext cx="0" cy="0"/>
+          <a:chOff x="0" y="0"/>
+          <a:chExt cx="0" cy="0"/>
+        </a:xfrm>
+      </p:grpSpPr>
+      <p:sp>
+        <p:nvSpPr>
+          <p:cNvPr id="2" name="Slide Image Placeholder 1"/>
+          <p:cNvSpPr>
+            <a:spLocks noGrp="1"/>
+          </p:cNvSpPr>
+          <p:nvPr>
+            <p:ph type="sldImg" idx="2"/>
+          </p:nvPr>
+        </p:nvSpPr>
+        <p:spPr/>
+      </p:sp>
+      <p:sp>
+        <p:nvSpPr>
+          <p:cNvPr id="3" name="Notes Placeholder 2"/>
+          <p:cNvSpPr>
+            <a:spLocks noGrp="1"/>
+          </p:cNvSpPr>
+          <p:nvPr>
+            <p:ph type="body" idx="3" sz="quarter"/>
+          </p:nvPr>
+        </p:nvSpPr>
+        <p:spPr/>
+        <p:txBody>
+          <a:bodyPr/>
+          <a:lstStyle/>
+          <a:p>
+            <a:r>
+              <a:t>Cours 01 : Problématique</a:t>
+            </a:r>
+          </a:p>
+          <a:p>
+            <a:r>
+              <a:t>Module RD</a:t>
+            </a:r>
+          </a:p>
+          <a:p>
+            <a:r>
+              <a:t>Dr. BELACEL Madani — Université de Mostaganem</a:t>
+            </a:r>
+          </a:p>
+          <a:p>
+            <a:r>
+              <a:t>Année 2026-2027</a:t>
+            </a:r>
+          </a:p>
+        </p:txBody>
+      </p:sp>
+      <p:sp>
+        <p:nvSpPr>
+          <p:cNvPr id="4" name="Slide Number Placeholder 3"/>
+          <p:cNvSpPr>
+            <a:spLocks noGrp="1"/>
+          </p:cNvSpPr>
+          <p:nvPr>
+            <p:ph type="sldNum" idx="5" sz="quarter"/>
+          </p:nvPr>
+        </p:nvSpPr>
+        <p:spPr/>
+      </p:sp>
+    </p:spTree>
+  </p:cSld>
+  <p:clrMapOvr>
+    <a:masterClrMapping/>
+  </p:clrMapOvr>
+</p:notes>
+</file>
+
+<file path=ppt/notesSlides/notesSlide10.xml><?xml version="1.0" encoding="utf-8"?>
+<p:notes xmlns:a="http://schemas.openxmlformats.org/drawingml/2006/main" xmlns:p="http://schemas.openxmlformats.org/presentationml/2006/main" xmlns:r="http://schemas.openxmlformats.org/officeDocument/2006/relationships">
+  <p:cSld>
+    <p:spTree>
+      <p:nvGrpSpPr>
+        <p:cNvPr id="1" name=""/>
+        <p:cNvGrpSpPr/>
+        <p:nvPr/>
+      </p:nvGrpSpPr>
+      <p:grpSpPr>
+        <a:xfrm>
+          <a:off x="0" y="0"/>
+          <a:ext cx="0" cy="0"/>
+          <a:chOff x="0" y="0"/>
+          <a:chExt cx="0" cy="0"/>
+        </a:xfrm>
+      </p:grpSpPr>
+      <p:sp>
+        <p:nvSpPr>
+          <p:cNvPr id="2" name="Slide Image Placeholder 1"/>
+          <p:cNvSpPr>
+            <a:spLocks noGrp="1"/>
+          </p:cNvSpPr>
+          <p:nvPr>
+            <p:ph type="sldImg" idx="2"/>
+          </p:nvPr>
+        </p:nvSpPr>
+        <p:spPr/>
+      </p:sp>
+      <p:sp>
+        <p:nvSpPr>
+          <p:cNvPr id="3" name="Notes Placeholder 2"/>
+          <p:cNvSpPr>
+            <a:spLocks noGrp="1"/>
+          </p:cNvSpPr>
+          <p:nvPr>
+            <p:ph type="body" idx="3" sz="quarter"/>
+          </p:nvPr>
+        </p:nvSpPr>
+        <p:spPr/>
+        <p:txBody>
+          <a:bodyPr/>
+          <a:lstStyle/>
+          <a:p>
+            <a:r>
+              <a:t>Cours 01 — Diapo 10/10</a:t>
+            </a:r>
+          </a:p>
+          <a:p>
+            <a:r>
+              <a:t>Problématique</a:t>
+            </a:r>
+          </a:p>
+          <a:p>
+            <a:r>
+              <a:t>Construction d'une problématique, hypothèses, questions</a:t>
+            </a:r>
+          </a:p>
+        </p:txBody>
+      </p:sp>
+      <p:sp>
+        <p:nvSpPr>
+          <p:cNvPr id="4" name="Slide Number Placeholder 3"/>
+          <p:cNvSpPr>
+            <a:spLocks noGrp="1"/>
+          </p:cNvSpPr>
+          <p:nvPr>
+            <p:ph type="sldNum" idx="5" sz="quarter"/>
+          </p:nvPr>
+        </p:nvSpPr>
+        <p:spPr/>
+      </p:sp>
+    </p:spTree>
+  </p:cSld>
+  <p:clrMapOvr>
+    <a:masterClrMapping/>
+  </p:clrMapOvr>
+</p:notes>
+</file>
+
+<file path=ppt/notesSlides/notesSlide2.xml><?xml version="1.0" encoding="utf-8"?>
+<p:notes xmlns:a="http://schemas.openxmlformats.org/drawingml/2006/main" xmlns:p="http://schemas.openxmlformats.org/presentationml/2006/main" xmlns:r="http://schemas.openxmlformats.org/officeDocument/2006/relationships">
+  <p:cSld>
+    <p:spTree>
+      <p:nvGrpSpPr>
+        <p:cNvPr id="1" name=""/>
+        <p:cNvGrpSpPr/>
+        <p:nvPr/>
+      </p:nvGrpSpPr>
+      <p:grpSpPr>
+        <a:xfrm>
+          <a:off x="0" y="0"/>
+          <a:ext cx="0" cy="0"/>
+          <a:chOff x="0" y="0"/>
+          <a:chExt cx="0" cy="0"/>
+        </a:xfrm>
+      </p:grpSpPr>
+      <p:sp>
+        <p:nvSpPr>
+          <p:cNvPr id="2" name="Slide Image Placeholder 1"/>
+          <p:cNvSpPr>
+            <a:spLocks noGrp="1"/>
+          </p:cNvSpPr>
+          <p:nvPr>
+            <p:ph type="sldImg" idx="2"/>
+          </p:nvPr>
+        </p:nvSpPr>
+        <p:spPr/>
+      </p:sp>
+      <p:sp>
+        <p:nvSpPr>
+          <p:cNvPr id="3" name="Notes Placeholder 2"/>
+          <p:cNvSpPr>
+            <a:spLocks noGrp="1"/>
+          </p:cNvSpPr>
+          <p:nvPr>
+            <p:ph type="body" idx="3" sz="quarter"/>
+          </p:nvPr>
+        </p:nvSpPr>
+        <p:spPr/>
+        <p:txBody>
+          <a:bodyPr/>
+          <a:lstStyle/>
+          <a:p>
+            <a:r>
+              <a:t>Cours 01 — Diapo 2/10</a:t>
+            </a:r>
+          </a:p>
+          <a:p>
+            <a:r>
+              <a:t>Problématique</a:t>
+            </a:r>
+          </a:p>
+          <a:p>
+            <a:r>
+              <a:t>Construction d'une problématique, hypothèses, questions</a:t>
+            </a:r>
+          </a:p>
+        </p:txBody>
+      </p:sp>
+      <p:sp>
+        <p:nvSpPr>
+          <p:cNvPr id="4" name="Slide Number Placeholder 3"/>
+          <p:cNvSpPr>
+            <a:spLocks noGrp="1"/>
+          </p:cNvSpPr>
+          <p:nvPr>
+            <p:ph type="sldNum" idx="5" sz="quarter"/>
+          </p:nvPr>
+        </p:nvSpPr>
+        <p:spPr/>
+      </p:sp>
+    </p:spTree>
+  </p:cSld>
+  <p:clrMapOvr>
+    <a:masterClrMapping/>
+  </p:clrMapOvr>
+</p:notes>
+</file>
+
+<file path=ppt/notesSlides/notesSlide3.xml><?xml version="1.0" encoding="utf-8"?>
+<p:notes xmlns:a="http://schemas.openxmlformats.org/drawingml/2006/main" xmlns:p="http://schemas.openxmlformats.org/presentationml/2006/main" xmlns:r="http://schemas.openxmlformats.org/officeDocument/2006/relationships">
+  <p:cSld>
+    <p:spTree>
+      <p:nvGrpSpPr>
+        <p:cNvPr id="1" name=""/>
+        <p:cNvGrpSpPr/>
+        <p:nvPr/>
+      </p:nvGrpSpPr>
+      <p:grpSpPr>
+        <a:xfrm>
+          <a:off x="0" y="0"/>
+          <a:ext cx="0" cy="0"/>
+          <a:chOff x="0" y="0"/>
+          <a:chExt cx="0" cy="0"/>
+        </a:xfrm>
+      </p:grpSpPr>
+      <p:sp>
+        <p:nvSpPr>
+          <p:cNvPr id="2" name="Slide Image Placeholder 1"/>
+          <p:cNvSpPr>
+            <a:spLocks noGrp="1"/>
+          </p:cNvSpPr>
+          <p:nvPr>
+            <p:ph type="sldImg" idx="2"/>
+          </p:nvPr>
+        </p:nvSpPr>
+        <p:spPr/>
+      </p:sp>
+      <p:sp>
+        <p:nvSpPr>
+          <p:cNvPr id="3" name="Notes Placeholder 2"/>
+          <p:cNvSpPr>
+            <a:spLocks noGrp="1"/>
+          </p:cNvSpPr>
+          <p:nvPr>
+            <p:ph type="body" idx="3" sz="quarter"/>
+          </p:nvPr>
+        </p:nvSpPr>
+        <p:spPr/>
+        <p:txBody>
+          <a:bodyPr/>
+          <a:lstStyle/>
+          <a:p>
+            <a:r>
+              <a:t>Cours 01 — Diapo 3/10</a:t>
+            </a:r>
+          </a:p>
+          <a:p>
+            <a:r>
+              <a:t>Problématique</a:t>
+            </a:r>
+          </a:p>
+          <a:p>
+            <a:r>
+              <a:t>Construction d'une problématique, hypothèses, questions</a:t>
+            </a:r>
+          </a:p>
+        </p:txBody>
+      </p:sp>
+      <p:sp>
+        <p:nvSpPr>
+          <p:cNvPr id="4" name="Slide Number Placeholder 3"/>
+          <p:cNvSpPr>
+            <a:spLocks noGrp="1"/>
+          </p:cNvSpPr>
+          <p:nvPr>
+            <p:ph type="sldNum" idx="5" sz="quarter"/>
+          </p:nvPr>
+        </p:nvSpPr>
+        <p:spPr/>
+      </p:sp>
+    </p:spTree>
+  </p:cSld>
+  <p:clrMapOvr>
+    <a:masterClrMapping/>
+  </p:clrMapOvr>
+</p:notes>
+</file>
+
+<file path=ppt/notesSlides/notesSlide4.xml><?xml version="1.0" encoding="utf-8"?>
+<p:notes xmlns:a="http://schemas.openxmlformats.org/drawingml/2006/main" xmlns:p="http://schemas.openxmlformats.org/presentationml/2006/main" xmlns:r="http://schemas.openxmlformats.org/officeDocument/2006/relationships">
+  <p:cSld>
+    <p:spTree>
+      <p:nvGrpSpPr>
+        <p:cNvPr id="1" name=""/>
+        <p:cNvGrpSpPr/>
+        <p:nvPr/>
+      </p:nvGrpSpPr>
+      <p:grpSpPr>
+        <a:xfrm>
+          <a:off x="0" y="0"/>
+          <a:ext cx="0" cy="0"/>
+          <a:chOff x="0" y="0"/>
+          <a:chExt cx="0" cy="0"/>
+        </a:xfrm>
+      </p:grpSpPr>
+      <p:sp>
+        <p:nvSpPr>
+          <p:cNvPr id="2" name="Slide Image Placeholder 1"/>
+          <p:cNvSpPr>
+            <a:spLocks noGrp="1"/>
+          </p:cNvSpPr>
+          <p:nvPr>
+            <p:ph type="sldImg" idx="2"/>
+          </p:nvPr>
+        </p:nvSpPr>
+        <p:spPr/>
+      </p:sp>
+      <p:sp>
+        <p:nvSpPr>
+          <p:cNvPr id="3" name="Notes Placeholder 2"/>
+          <p:cNvSpPr>
+            <a:spLocks noGrp="1"/>
+          </p:cNvSpPr>
+          <p:nvPr>
+            <p:ph type="body" idx="3" sz="quarter"/>
+          </p:nvPr>
+        </p:nvSpPr>
+        <p:spPr/>
+        <p:txBody>
+          <a:bodyPr/>
+          <a:lstStyle/>
+          <a:p>
+            <a:r>
+              <a:t>Cours 01 — Diapo 4/10</a:t>
+            </a:r>
+          </a:p>
+          <a:p>
+            <a:r>
+              <a:t>Problématique</a:t>
+            </a:r>
+          </a:p>
+          <a:p>
+            <a:r>
+              <a:t>Construction d'une problématique, hypothèses, questions</a:t>
+            </a:r>
+          </a:p>
+        </p:txBody>
+      </p:sp>
+      <p:sp>
+        <p:nvSpPr>
+          <p:cNvPr id="4" name="Slide Number Placeholder 3"/>
+          <p:cNvSpPr>
+            <a:spLocks noGrp="1"/>
+          </p:cNvSpPr>
+          <p:nvPr>
+            <p:ph type="sldNum" idx="5" sz="quarter"/>
+          </p:nvPr>
+        </p:nvSpPr>
+        <p:spPr/>
+      </p:sp>
+    </p:spTree>
+  </p:cSld>
+  <p:clrMapOvr>
+    <a:masterClrMapping/>
+  </p:clrMapOvr>
+</p:notes>
+</file>
+
+<file path=ppt/notesSlides/notesSlide5.xml><?xml version="1.0" encoding="utf-8"?>
+<p:notes xmlns:a="http://schemas.openxmlformats.org/drawingml/2006/main" xmlns:p="http://schemas.openxmlformats.org/presentationml/2006/main" xmlns:r="http://schemas.openxmlformats.org/officeDocument/2006/relationships">
+  <p:cSld>
+    <p:spTree>
+      <p:nvGrpSpPr>
+        <p:cNvPr id="1" name=""/>
+        <p:cNvGrpSpPr/>
+        <p:nvPr/>
+      </p:nvGrpSpPr>
+      <p:grpSpPr>
+        <a:xfrm>
+          <a:off x="0" y="0"/>
+          <a:ext cx="0" cy="0"/>
+          <a:chOff x="0" y="0"/>
+          <a:chExt cx="0" cy="0"/>
+        </a:xfrm>
+      </p:grpSpPr>
+      <p:sp>
+        <p:nvSpPr>
+          <p:cNvPr id="2" name="Slide Image Placeholder 1"/>
+          <p:cNvSpPr>
+            <a:spLocks noGrp="1"/>
+          </p:cNvSpPr>
+          <p:nvPr>
+            <p:ph type="sldImg" idx="2"/>
+          </p:nvPr>
+        </p:nvSpPr>
+        <p:spPr/>
+      </p:sp>
+      <p:sp>
+        <p:nvSpPr>
+          <p:cNvPr id="3" name="Notes Placeholder 2"/>
+          <p:cNvSpPr>
+            <a:spLocks noGrp="1"/>
+          </p:cNvSpPr>
+          <p:nvPr>
+            <p:ph type="body" idx="3" sz="quarter"/>
+          </p:nvPr>
+        </p:nvSpPr>
+        <p:spPr/>
+        <p:txBody>
+          <a:bodyPr/>
+          <a:lstStyle/>
+          <a:p>
+            <a:r>
+              <a:t>Cours 01 — Diapo 5/10</a:t>
+            </a:r>
+          </a:p>
+          <a:p>
+            <a:r>
+              <a:t>Problématique</a:t>
+            </a:r>
+          </a:p>
+          <a:p>
+            <a:r>
+              <a:t>Construction d'une problématique, hypothèses, questions</a:t>
+            </a:r>
+          </a:p>
+        </p:txBody>
+      </p:sp>
+      <p:sp>
+        <p:nvSpPr>
+          <p:cNvPr id="4" name="Slide Number Placeholder 3"/>
+          <p:cNvSpPr>
+            <a:spLocks noGrp="1"/>
+          </p:cNvSpPr>
+          <p:nvPr>
+            <p:ph type="sldNum" idx="5" sz="quarter"/>
+          </p:nvPr>
+        </p:nvSpPr>
+        <p:spPr/>
+      </p:sp>
+    </p:spTree>
+  </p:cSld>
+  <p:clrMapOvr>
+    <a:masterClrMapping/>
+  </p:clrMapOvr>
+</p:notes>
+</file>
+
+<file path=ppt/notesSlides/notesSlide6.xml><?xml version="1.0" encoding="utf-8"?>
+<p:notes xmlns:a="http://schemas.openxmlformats.org/drawingml/2006/main" xmlns:p="http://schemas.openxmlformats.org/presentationml/2006/main" xmlns:r="http://schemas.openxmlformats.org/officeDocument/2006/relationships">
+  <p:cSld>
+    <p:spTree>
+      <p:nvGrpSpPr>
+        <p:cNvPr id="1" name=""/>
+        <p:cNvGrpSpPr/>
+        <p:nvPr/>
+      </p:nvGrpSpPr>
+      <p:grpSpPr>
+        <a:xfrm>
+          <a:off x="0" y="0"/>
+          <a:ext cx="0" cy="0"/>
+          <a:chOff x="0" y="0"/>
+          <a:chExt cx="0" cy="0"/>
+        </a:xfrm>
+      </p:grpSpPr>
+      <p:sp>
+        <p:nvSpPr>
+          <p:cNvPr id="2" name="Slide Image Placeholder 1"/>
+          <p:cNvSpPr>
+            <a:spLocks noGrp="1"/>
+          </p:cNvSpPr>
+          <p:nvPr>
+            <p:ph type="sldImg" idx="2"/>
+          </p:nvPr>
+        </p:nvSpPr>
+        <p:spPr/>
+      </p:sp>
+      <p:sp>
+        <p:nvSpPr>
+          <p:cNvPr id="3" name="Notes Placeholder 2"/>
+          <p:cNvSpPr>
+            <a:spLocks noGrp="1"/>
+          </p:cNvSpPr>
+          <p:nvPr>
+            <p:ph type="body" idx="3" sz="quarter"/>
+          </p:nvPr>
+        </p:nvSpPr>
+        <p:spPr/>
+        <p:txBody>
+          <a:bodyPr/>
+          <a:lstStyle/>
+          <a:p>
+            <a:r>
+              <a:t>Cours 01 — Diapo 6/10</a:t>
+            </a:r>
+          </a:p>
+          <a:p>
+            <a:r>
+              <a:t>Problématique</a:t>
+            </a:r>
+          </a:p>
+          <a:p>
+            <a:r>
+              <a:t>Construction d'une problématique, hypothèses, questions</a:t>
+            </a:r>
+          </a:p>
+        </p:txBody>
+      </p:sp>
+      <p:sp>
+        <p:nvSpPr>
+          <p:cNvPr id="4" name="Slide Number Placeholder 3"/>
+          <p:cNvSpPr>
+            <a:spLocks noGrp="1"/>
+          </p:cNvSpPr>
+          <p:nvPr>
+            <p:ph type="sldNum" idx="5" sz="quarter"/>
+          </p:nvPr>
+        </p:nvSpPr>
+        <p:spPr/>
+      </p:sp>
+    </p:spTree>
+  </p:cSld>
+  <p:clrMapOvr>
+    <a:masterClrMapping/>
+  </p:clrMapOvr>
+</p:notes>
+</file>
+
+<file path=ppt/notesSlides/notesSlide7.xml><?xml version="1.0" encoding="utf-8"?>
+<p:notes xmlns:a="http://schemas.openxmlformats.org/drawingml/2006/main" xmlns:p="http://schemas.openxmlformats.org/presentationml/2006/main" xmlns:r="http://schemas.openxmlformats.org/officeDocument/2006/relationships">
+  <p:cSld>
+    <p:spTree>
+      <p:nvGrpSpPr>
+        <p:cNvPr id="1" name=""/>
+        <p:cNvGrpSpPr/>
+        <p:nvPr/>
+      </p:nvGrpSpPr>
+      <p:grpSpPr>
+        <a:xfrm>
+          <a:off x="0" y="0"/>
+          <a:ext cx="0" cy="0"/>
+          <a:chOff x="0" y="0"/>
+          <a:chExt cx="0" cy="0"/>
+        </a:xfrm>
+      </p:grpSpPr>
+      <p:sp>
+        <p:nvSpPr>
+          <p:cNvPr id="2" name="Slide Image Placeholder 1"/>
+          <p:cNvSpPr>
+            <a:spLocks noGrp="1"/>
+          </p:cNvSpPr>
+          <p:nvPr>
+            <p:ph type="sldImg" idx="2"/>
+          </p:nvPr>
+        </p:nvSpPr>
+        <p:spPr/>
+      </p:sp>
+      <p:sp>
+        <p:nvSpPr>
+          <p:cNvPr id="3" name="Notes Placeholder 2"/>
+          <p:cNvSpPr>
+            <a:spLocks noGrp="1"/>
+          </p:cNvSpPr>
+          <p:nvPr>
+            <p:ph type="body" idx="3" sz="quarter"/>
+          </p:nvPr>
+        </p:nvSpPr>
+        <p:spPr/>
+        <p:txBody>
+          <a:bodyPr/>
+          <a:lstStyle/>
+          <a:p>
+            <a:r>
+              <a:t>Cours 01 — Diapo 7/10</a:t>
+            </a:r>
+          </a:p>
+          <a:p>
+            <a:r>
+              <a:t>Problématique</a:t>
+            </a:r>
+          </a:p>
+          <a:p>
+            <a:r>
+              <a:t>Construction d'une problématique, hypothèses, questions</a:t>
+            </a:r>
+          </a:p>
+        </p:txBody>
+      </p:sp>
+      <p:sp>
+        <p:nvSpPr>
+          <p:cNvPr id="4" name="Slide Number Placeholder 3"/>
+          <p:cNvSpPr>
+            <a:spLocks noGrp="1"/>
+          </p:cNvSpPr>
+          <p:nvPr>
+            <p:ph type="sldNum" idx="5" sz="quarter"/>
+          </p:nvPr>
+        </p:nvSpPr>
+        <p:spPr/>
+      </p:sp>
+    </p:spTree>
+  </p:cSld>
+  <p:clrMapOvr>
+    <a:masterClrMapping/>
+  </p:clrMapOvr>
+</p:notes>
+</file>
+
+<file path=ppt/notesSlides/notesSlide8.xml><?xml version="1.0" encoding="utf-8"?>
+<p:notes xmlns:a="http://schemas.openxmlformats.org/drawingml/2006/main" xmlns:p="http://schemas.openxmlformats.org/presentationml/2006/main" xmlns:r="http://schemas.openxmlformats.org/officeDocument/2006/relationships">
+  <p:cSld>
+    <p:spTree>
+      <p:nvGrpSpPr>
+        <p:cNvPr id="1" name=""/>
+        <p:cNvGrpSpPr/>
+        <p:nvPr/>
+      </p:nvGrpSpPr>
+      <p:grpSpPr>
+        <a:xfrm>
+          <a:off x="0" y="0"/>
+          <a:ext cx="0" cy="0"/>
+          <a:chOff x="0" y="0"/>
+          <a:chExt cx="0" cy="0"/>
+        </a:xfrm>
+      </p:grpSpPr>
+      <p:sp>
+        <p:nvSpPr>
+          <p:cNvPr id="2" name="Slide Image Placeholder 1"/>
+          <p:cNvSpPr>
+            <a:spLocks noGrp="1"/>
+          </p:cNvSpPr>
+          <p:nvPr>
+            <p:ph type="sldImg" idx="2"/>
+          </p:nvPr>
+        </p:nvSpPr>
+        <p:spPr/>
+      </p:sp>
+      <p:sp>
+        <p:nvSpPr>
+          <p:cNvPr id="3" name="Notes Placeholder 2"/>
+          <p:cNvSpPr>
+            <a:spLocks noGrp="1"/>
+          </p:cNvSpPr>
+          <p:nvPr>
+            <p:ph type="body" idx="3" sz="quarter"/>
+          </p:nvPr>
+        </p:nvSpPr>
+        <p:spPr/>
+        <p:txBody>
+          <a:bodyPr/>
+          <a:lstStyle/>
+          <a:p>
+            <a:r>
+              <a:t>Cours 01 — Diapo 8/10</a:t>
+            </a:r>
+          </a:p>
+          <a:p>
+            <a:r>
+              <a:t>Problématique</a:t>
+            </a:r>
+          </a:p>
+          <a:p>
+            <a:r>
+              <a:t>Construction d'une problématique, hypothèses, questions</a:t>
+            </a:r>
+          </a:p>
+        </p:txBody>
+      </p:sp>
+      <p:sp>
+        <p:nvSpPr>
+          <p:cNvPr id="4" name="Slide Number Placeholder 3"/>
+          <p:cNvSpPr>
+            <a:spLocks noGrp="1"/>
+          </p:cNvSpPr>
+          <p:nvPr>
+            <p:ph type="sldNum" idx="5" sz="quarter"/>
+          </p:nvPr>
+        </p:nvSpPr>
+        <p:spPr/>
+      </p:sp>
+    </p:spTree>
+  </p:cSld>
+  <p:clrMapOvr>
+    <a:masterClrMapping/>
+  </p:clrMapOvr>
+</p:notes>
+</file>
+
+<file path=ppt/notesSlides/notesSlide9.xml><?xml version="1.0" encoding="utf-8"?>
+<p:notes xmlns:a="http://schemas.openxmlformats.org/drawingml/2006/main" xmlns:p="http://schemas.openxmlformats.org/presentationml/2006/main" xmlns:r="http://schemas.openxmlformats.org/officeDocument/2006/relationships">
+  <p:cSld>
+    <p:spTree>
+      <p:nvGrpSpPr>
+        <p:cNvPr id="1" name=""/>
+        <p:cNvGrpSpPr/>
+        <p:nvPr/>
+      </p:nvGrpSpPr>
+      <p:grpSpPr>
+        <a:xfrm>
+          <a:off x="0" y="0"/>
+          <a:ext cx="0" cy="0"/>
+          <a:chOff x="0" y="0"/>
+          <a:chExt cx="0" cy="0"/>
+        </a:xfrm>
+      </p:grpSpPr>
+      <p:sp>
+        <p:nvSpPr>
+          <p:cNvPr id="2" name="Slide Image Placeholder 1"/>
+          <p:cNvSpPr>
+            <a:spLocks noGrp="1"/>
+          </p:cNvSpPr>
+          <p:nvPr>
+            <p:ph type="sldImg" idx="2"/>
+          </p:nvPr>
+        </p:nvSpPr>
+        <p:spPr/>
+      </p:sp>
+      <p:sp>
+        <p:nvSpPr>
+          <p:cNvPr id="3" name="Notes Placeholder 2"/>
+          <p:cNvSpPr>
+            <a:spLocks noGrp="1"/>
+          </p:cNvSpPr>
+          <p:nvPr>
+            <p:ph type="body" idx="3" sz="quarter"/>
+          </p:nvPr>
+        </p:nvSpPr>
+        <p:spPr/>
+        <p:txBody>
+          <a:bodyPr/>
+          <a:lstStyle/>
+          <a:p>
+            <a:r>
+              <a:t>Cours 01 — Diapo 9/10</a:t>
+            </a:r>
+          </a:p>
+          <a:p>
+            <a:r>
+              <a:t>Problématique</a:t>
+            </a:r>
+          </a:p>
+          <a:p>
+            <a:r>
+              <a:t>Construction d'une problématique, hypothèses, questions</a:t>
+            </a:r>
+          </a:p>
+        </p:txBody>
+      </p:sp>
+      <p:sp>
+        <p:nvSpPr>
+          <p:cNvPr id="4" name="Slide Number Placeholder 3"/>
+          <p:cNvSpPr>
+            <a:spLocks noGrp="1"/>
+          </p:cNvSpPr>
+          <p:nvPr>
+            <p:ph type="sldNum" idx="5" sz="quarter"/>
+          </p:nvPr>
+        </p:nvSpPr>
+        <p:spPr/>
+      </p:sp>
+    </p:spTree>
+  </p:cSld>
+  <p:clrMapOvr>
+    <a:masterClrMapping/>
+  </p:clrMapOvr>
+</p:notes>
 </file>
 
 <file path=ppt/slideLayouts/slideLayout1.xml><?xml version="1.0" encoding="utf-8"?>
@@ -3299,6 +4454,30 @@
           </a:p>
         </p:txBody>
       </p:sp>
+      <p:pic>
+        <p:nvPicPr>
+          <p:cNvPr id="5" name="Picture 4" descr="RD_s05.png"/>
+          <p:cNvPicPr>
+            <a:picLocks noChangeAspect="1"/>
+          </p:cNvPicPr>
+          <p:nvPr/>
+        </p:nvPicPr>
+        <p:blipFill>
+          <a:blip r:embed="rId3"/>
+          <a:stretch>
+            <a:fillRect/>
+          </a:stretch>
+        </p:blipFill>
+        <p:spPr>
+          <a:xfrm>
+            <a:off x="274320" y="5001768"/>
+            <a:ext cx="2011680" cy="1124712"/>
+          </a:xfrm>
+          <a:prstGeom prst="rect">
+            <a:avLst/>
+          </a:prstGeom>
+        </p:spPr>
+      </p:pic>
     </p:spTree>
   </p:cSld>
   <p:clrMapOvr>
@@ -3424,6 +4603,30 @@
           </a:p>
         </p:txBody>
       </p:sp>
+      <p:pic>
+        <p:nvPicPr>
+          <p:cNvPr id="5" name="Picture 4" descr="RD_s01.png"/>
+          <p:cNvPicPr>
+            <a:picLocks noChangeAspect="1"/>
+          </p:cNvPicPr>
+          <p:nvPr/>
+        </p:nvPicPr>
+        <p:blipFill>
+          <a:blip r:embed="rId3"/>
+          <a:stretch>
+            <a:fillRect/>
+          </a:stretch>
+        </p:blipFill>
+        <p:spPr>
+          <a:xfrm>
+            <a:off x="9905695" y="5001768"/>
+            <a:ext cx="2011680" cy="1124712"/>
+          </a:xfrm>
+          <a:prstGeom prst="rect">
+            <a:avLst/>
+          </a:prstGeom>
+        </p:spPr>
+      </p:pic>
     </p:spTree>
   </p:cSld>
   <p:clrMapOvr>
@@ -3682,6 +4885,30 @@
           </a:p>
         </p:txBody>
       </p:sp>
+      <p:pic>
+        <p:nvPicPr>
+          <p:cNvPr id="5" name="Picture 4" descr="RD_s03.png"/>
+          <p:cNvPicPr>
+            <a:picLocks noChangeAspect="1"/>
+          </p:cNvPicPr>
+          <p:nvPr/>
+        </p:nvPicPr>
+        <p:blipFill>
+          <a:blip r:embed="rId3"/>
+          <a:stretch>
+            <a:fillRect/>
+          </a:stretch>
+        </p:blipFill>
+        <p:spPr>
+          <a:xfrm>
+            <a:off x="274320" y="5001768"/>
+            <a:ext cx="2011680" cy="1124712"/>
+          </a:xfrm>
+          <a:prstGeom prst="rect">
+            <a:avLst/>
+          </a:prstGeom>
+        </p:spPr>
+      </p:pic>
     </p:spTree>
   </p:cSld>
   <p:clrMapOvr>
@@ -3932,6 +5159,30 @@
           </a:p>
         </p:txBody>
       </p:sp>
+      <p:pic>
+        <p:nvPicPr>
+          <p:cNvPr id="5" name="Picture 4" descr="RD_s05.png"/>
+          <p:cNvPicPr>
+            <a:picLocks noChangeAspect="1"/>
+          </p:cNvPicPr>
+          <p:nvPr/>
+        </p:nvPicPr>
+        <p:blipFill>
+          <a:blip r:embed="rId3"/>
+          <a:stretch>
+            <a:fillRect/>
+          </a:stretch>
+        </p:blipFill>
+        <p:spPr>
+          <a:xfrm>
+            <a:off x="9905695" y="1005840"/>
+            <a:ext cx="2011680" cy="1124712"/>
+          </a:xfrm>
+          <a:prstGeom prst="rect">
+            <a:avLst/>
+          </a:prstGeom>
+        </p:spPr>
+      </p:pic>
     </p:spTree>
   </p:cSld>
   <p:clrMapOvr>
@@ -4182,6 +5433,30 @@
           </a:p>
         </p:txBody>
       </p:sp>
+      <p:pic>
+        <p:nvPicPr>
+          <p:cNvPr id="5" name="Picture 4" descr="RD_s05.png"/>
+          <p:cNvPicPr>
+            <a:picLocks noChangeAspect="1"/>
+          </p:cNvPicPr>
+          <p:nvPr/>
+        </p:nvPicPr>
+        <p:blipFill>
+          <a:blip r:embed="rId3"/>
+          <a:stretch>
+            <a:fillRect/>
+          </a:stretch>
+        </p:blipFill>
+        <p:spPr>
+          <a:xfrm>
+            <a:off x="9905695" y="5001768"/>
+            <a:ext cx="2011680" cy="1124712"/>
+          </a:xfrm>
+          <a:prstGeom prst="rect">
+            <a:avLst/>
+          </a:prstGeom>
+        </p:spPr>
+      </p:pic>
     </p:spTree>
   </p:cSld>
   <p:clrMapOvr>
@@ -4636,4 +5911,324 @@
   </a:objectDefaults>
   <a:extraClrSchemeLst/>
 </a:theme>
+</file>
+
+<file path=ppt/theme/theme2.xml><?xml version="1.0" encoding="utf-8"?>
+<a:theme xmlns:a="http://schemas.openxmlformats.org/drawingml/2006/main" name="Office Theme">
+  <a:themeElements>
+    <a:clrScheme name="Office">
+      <a:dk1>
+        <a:sysClr val="windowText" lastClr="000000"/>
+      </a:dk1>
+      <a:lt1>
+        <a:sysClr val="window" lastClr="FFFFFF"/>
+      </a:lt1>
+      <a:dk2>
+        <a:srgbClr val="1F497D"/>
+      </a:dk2>
+      <a:lt2>
+        <a:srgbClr val="EEECE1"/>
+      </a:lt2>
+      <a:accent1>
+        <a:srgbClr val="4F81BD"/>
+      </a:accent1>
+      <a:accent2>
+        <a:srgbClr val="C0504D"/>
+      </a:accent2>
+      <a:accent3>
+        <a:srgbClr val="9BBB59"/>
+      </a:accent3>
+      <a:accent4>
+        <a:srgbClr val="8064A2"/>
+      </a:accent4>
+      <a:accent5>
+        <a:srgbClr val="4BACC6"/>
+      </a:accent5>
+      <a:accent6>
+        <a:srgbClr val="F79646"/>
+      </a:accent6>
+      <a:hlink>
+        <a:srgbClr val="0000FF"/>
+      </a:hlink>
+      <a:folHlink>
+        <a:srgbClr val="800080"/>
+      </a:folHlink>
+    </a:clrScheme>
+    <a:fontScheme name="Office">
+      <a:majorFont>
+        <a:latin typeface="Calibri"/>
+        <a:ea typeface=""/>
+        <a:cs typeface=""/>
+        <a:font script="Jpan" typeface="ＭＳ Ｐゴシック"/>
+        <a:font script="Hang" typeface="맑은 고딕"/>
+        <a:font script="Hans" typeface="宋体"/>
+        <a:font script="Hant" typeface="新細明體"/>
+        <a:font script="Arab" typeface="Times New Roman"/>
+        <a:font script="Hebr" typeface="Times New Roman"/>
+        <a:font script="Thai" typeface="Angsana New"/>
+        <a:font script="Ethi" typeface="Nyala"/>
+        <a:font script="Beng" typeface="Vrinda"/>
+        <a:font script="Gujr" typeface="Shruti"/>
+        <a:font script="Khmr" typeface="MoolBoran"/>
+        <a:font script="Knda" typeface="Tunga"/>
+        <a:font script="Guru" typeface="Raavi"/>
+        <a:font script="Cans" typeface="Euphemia"/>
+        <a:font script="Cher" typeface="Plantagenet Cherokee"/>
+        <a:font script="Yiii" typeface="Microsoft Yi Baiti"/>
+        <a:font script="Tibt" typeface="Microsoft Himalaya"/>
+        <a:font script="Thaa" typeface="MV Boli"/>
+        <a:font script="Deva" typeface="Mangal"/>
+        <a:font script="Telu" typeface="Gautami"/>
+        <a:font script="Taml" typeface="Latha"/>
+        <a:font script="Syrc" typeface="Estrangelo Edessa"/>
+        <a:font script="Orya" typeface="Kalinga"/>
+        <a:font script="Mlym" typeface="Kartika"/>
+        <a:font script="Laoo" typeface="DokChampa"/>
+        <a:font script="Sinh" typeface="Iskoola Pota"/>
+        <a:font script="Mong" typeface="Mongolian Baiti"/>
+        <a:font script="Viet" typeface="Times New Roman"/>
+        <a:font script="Uigh" typeface="Microsoft Uighur"/>
+        <a:font script="Geor" typeface="Sylfaen"/>
+      </a:majorFont>
+      <a:minorFont>
+        <a:latin typeface="Calibri"/>
+        <a:ea typeface=""/>
+        <a:cs typeface=""/>
+        <a:font script="Jpan" typeface="ＭＳ Ｐゴシック"/>
+        <a:font script="Hang" typeface="맑은 고딕"/>
+        <a:font script="Hans" typeface="宋体"/>
+        <a:font script="Hant" typeface="新細明體"/>
+        <a:font script="Arab" typeface="Arial"/>
+        <a:font script="Hebr" typeface="Arial"/>
+        <a:font script="Thai" typeface="Cordia New"/>
+        <a:font script="Ethi" typeface="Nyala"/>
+        <a:font script="Beng" typeface="Vrinda"/>
+        <a:font script="Gujr" typeface="Shruti"/>
+        <a:font script="Khmr" typeface="DaunPenh"/>
+        <a:font script="Knda" typeface="Tunga"/>
+        <a:font script="Guru" typeface="Raavi"/>
+        <a:font script="Cans" typeface="Euphemia"/>
+        <a:font script="Cher" typeface="Plantagenet Cherokee"/>
+        <a:font script="Yiii" typeface="Microsoft Yi Baiti"/>
+        <a:font script="Tibt" typeface="Microsoft Himalaya"/>
+        <a:font script="Thaa" typeface="MV Boli"/>
+        <a:font script="Deva" typeface="Mangal"/>
+        <a:font script="Telu" typeface="Gautami"/>
+        <a:font script="Taml" typeface="Latha"/>
+        <a:font script="Syrc" typeface="Estrangelo Edessa"/>
+        <a:font script="Orya" typeface="Kalinga"/>
+        <a:font script="Mlym" typeface="Kartika"/>
+        <a:font script="Laoo" typeface="DokChampa"/>
+        <a:font script="Sinh" typeface="Iskoola Pota"/>
+        <a:font script="Mong" typeface="Mongolian Baiti"/>
+        <a:font script="Viet" typeface="Arial"/>
+        <a:font script="Uigh" typeface="Microsoft Uighur"/>
+        <a:font script="Geor" typeface="Sylfaen"/>
+      </a:minorFont>
+    </a:fontScheme>
+    <a:fmtScheme name="Office">
+      <a:fillStyleLst>
+        <a:solidFill>
+          <a:schemeClr val="phClr"/>
+        </a:solidFill>
+        <a:gradFill rotWithShape="1">
+          <a:gsLst>
+            <a:gs pos="0">
+              <a:schemeClr val="phClr">
+                <a:tint val="50000"/>
+                <a:satMod val="300000"/>
+              </a:schemeClr>
+            </a:gs>
+            <a:gs pos="35000">
+              <a:schemeClr val="phClr">
+                <a:tint val="37000"/>
+                <a:satMod val="300000"/>
+              </a:schemeClr>
+            </a:gs>
+            <a:gs pos="100000">
+              <a:schemeClr val="phClr">
+                <a:tint val="15000"/>
+                <a:satMod val="350000"/>
+              </a:schemeClr>
+            </a:gs>
+          </a:gsLst>
+          <a:lin ang="16200000" scaled="1"/>
+        </a:gradFill>
+        <a:gradFill rotWithShape="1">
+          <a:gsLst>
+            <a:gs pos="0">
+              <a:schemeClr val="phClr">
+                <a:tint val="100000"/>
+                <a:shade val="100000"/>
+                <a:satMod val="130000"/>
+              </a:schemeClr>
+            </a:gs>
+            <a:gs pos="100000">
+              <a:schemeClr val="phClr">
+                <a:tint val="50000"/>
+                <a:shade val="100000"/>
+                <a:satMod val="350000"/>
+              </a:schemeClr>
+            </a:gs>
+          </a:gsLst>
+          <a:lin ang="16200000" scaled="0"/>
+        </a:gradFill>
+      </a:fillStyleLst>
+      <a:lnStyleLst>
+        <a:ln w="9525" cap="flat" cmpd="sng" algn="ctr">
+          <a:solidFill>
+            <a:schemeClr val="phClr">
+              <a:shade val="95000"/>
+              <a:satMod val="105000"/>
+            </a:schemeClr>
+          </a:solidFill>
+          <a:prstDash val="solid"/>
+        </a:ln>
+        <a:ln w="25400" cap="flat" cmpd="sng" algn="ctr">
+          <a:solidFill>
+            <a:schemeClr val="phClr"/>
+          </a:solidFill>
+          <a:prstDash val="solid"/>
+        </a:ln>
+        <a:ln w="38100" cap="flat" cmpd="sng" algn="ctr">
+          <a:solidFill>
+            <a:schemeClr val="phClr"/>
+          </a:solidFill>
+          <a:prstDash val="solid"/>
+        </a:ln>
+      </a:lnStyleLst>
+      <a:effectStyleLst>
+        <a:effectStyle>
+          <a:effectLst>
+            <a:outerShdw blurRad="40000" dist="20000" dir="5400000" rotWithShape="0">
+              <a:srgbClr val="000000">
+                <a:alpha val="38000"/>
+              </a:srgbClr>
+            </a:outerShdw>
+          </a:effectLst>
+        </a:effectStyle>
+        <a:effectStyle>
+          <a:effectLst>
+            <a:outerShdw blurRad="40000" dist="23000" dir="5400000" rotWithShape="0">
+              <a:srgbClr val="000000">
+                <a:alpha val="35000"/>
+              </a:srgbClr>
+            </a:outerShdw>
+          </a:effectLst>
+        </a:effectStyle>
+        <a:effectStyle>
+          <a:effectLst>
+            <a:outerShdw blurRad="40000" dist="23000" dir="5400000" rotWithShape="0">
+              <a:srgbClr val="000000">
+                <a:alpha val="35000"/>
+              </a:srgbClr>
+            </a:outerShdw>
+          </a:effectLst>
+          <a:scene3d>
+            <a:camera prst="orthographicFront">
+              <a:rot lat="0" lon="0" rev="0"/>
+            </a:camera>
+            <a:lightRig rig="threePt" dir="t">
+              <a:rot lat="0" lon="0" rev="1200000"/>
+            </a:lightRig>
+          </a:scene3d>
+          <a:sp3d>
+            <a:bevelT w="63500" h="25400"/>
+          </a:sp3d>
+        </a:effectStyle>
+      </a:effectStyleLst>
+      <a:bgFillStyleLst>
+        <a:solidFill>
+          <a:schemeClr val="phClr"/>
+        </a:solidFill>
+        <a:gradFill rotWithShape="1">
+          <a:gsLst>
+            <a:gs pos="0">
+              <a:schemeClr val="phClr">
+                <a:tint val="40000"/>
+                <a:satMod val="350000"/>
+              </a:schemeClr>
+            </a:gs>
+            <a:gs pos="40000">
+              <a:schemeClr val="phClr">
+                <a:tint val="45000"/>
+                <a:shade val="99000"/>
+                <a:satMod val="350000"/>
+              </a:schemeClr>
+            </a:gs>
+            <a:gs pos="100000">
+              <a:schemeClr val="phClr">
+                <a:shade val="20000"/>
+                <a:satMod val="255000"/>
+              </a:schemeClr>
+            </a:gs>
+          </a:gsLst>
+          <a:path path="circle">
+            <a:fillToRect l="50000" t="-80000" r="50000" b="180000"/>
+          </a:path>
+        </a:gradFill>
+        <a:gradFill rotWithShape="1">
+          <a:gsLst>
+            <a:gs pos="0">
+              <a:schemeClr val="phClr">
+                <a:tint val="80000"/>
+                <a:satMod val="300000"/>
+              </a:schemeClr>
+            </a:gs>
+            <a:gs pos="100000">
+              <a:schemeClr val="phClr">
+                <a:shade val="30000"/>
+                <a:satMod val="200000"/>
+              </a:schemeClr>
+            </a:gs>
+          </a:gsLst>
+          <a:path path="circle">
+            <a:fillToRect l="50000" t="50000" r="50000" b="50000"/>
+          </a:path>
+        </a:gradFill>
+      </a:bgFillStyleLst>
+    </a:fmtScheme>
+  </a:themeElements>
+  <a:objectDefaults>
+    <a:spDef>
+      <a:spPr/>
+      <a:bodyPr/>
+      <a:lstStyle/>
+      <a:style>
+        <a:lnRef idx="1">
+          <a:schemeClr val="accent1"/>
+        </a:lnRef>
+        <a:fillRef idx="3">
+          <a:schemeClr val="accent1"/>
+        </a:fillRef>
+        <a:effectRef idx="2">
+          <a:schemeClr val="accent1"/>
+        </a:effectRef>
+        <a:fontRef idx="minor">
+          <a:schemeClr val="lt1"/>
+        </a:fontRef>
+      </a:style>
+    </a:spDef>
+    <a:lnDef>
+      <a:spPr/>
+      <a:bodyPr/>
+      <a:lstStyle/>
+      <a:style>
+        <a:lnRef idx="2">
+          <a:schemeClr val="accent1"/>
+        </a:lnRef>
+        <a:fillRef idx="0">
+          <a:schemeClr val="accent1"/>
+        </a:fillRef>
+        <a:effectRef idx="1">
+          <a:schemeClr val="accent1"/>
+        </a:effectRef>
+        <a:fontRef idx="minor">
+          <a:schemeClr val="tx1"/>
+        </a:fontRef>
+      </a:style>
+    </a:lnDef>
+  </a:objectDefaults>
+  <a:extraClrSchemeLst/>
+</a:theme>
 </file>
--- a/cours/Module Recherche Documentaire/Département Anglais/Master 2 - DLE/Cours_Recherche_Documentaire_M2_DLE_01_EN.pptx
+++ b/cours/Module Recherche Documentaire/Département Anglais/Master 2 - DLE/Cours_Recherche_Documentaire_M2_DLE_01_EN.pptx
@@ -4000,7 +4000,7 @@
           <a:solidFill>
             <a:schemeClr val="tx1"/>
           </a:solidFill>
-          <a:latin typeface="+mj-lt"/>
+          <a:latin typeface="Poppins"/>
           <a:ea typeface="+mj-ea"/>
           <a:cs typeface="+mj-cs"/>
         </a:defRPr>
@@ -4017,7 +4017,7 @@
           <a:solidFill>
             <a:schemeClr val="tx1"/>
           </a:solidFill>
-          <a:latin typeface="+mn-lt"/>
+          <a:latin typeface="Poppins"/>
           <a:ea typeface="+mn-ea"/>
           <a:cs typeface="+mn-cs"/>
         </a:defRPr>
@@ -4032,7 +4032,7 @@
           <a:solidFill>
             <a:schemeClr val="tx1"/>
           </a:solidFill>
-          <a:latin typeface="+mn-lt"/>
+          <a:latin typeface="Poppins"/>
           <a:ea typeface="+mn-ea"/>
           <a:cs typeface="+mn-cs"/>
         </a:defRPr>
@@ -4047,7 +4047,7 @@
           <a:solidFill>
             <a:schemeClr val="tx1"/>
           </a:solidFill>
-          <a:latin typeface="+mn-lt"/>
+          <a:latin typeface="Poppins"/>
           <a:ea typeface="+mn-ea"/>
           <a:cs typeface="+mn-cs"/>
         </a:defRPr>
@@ -4062,7 +4062,7 @@
           <a:solidFill>
             <a:schemeClr val="tx1"/>
           </a:solidFill>
-          <a:latin typeface="+mn-lt"/>
+          <a:latin typeface="Poppins"/>
           <a:ea typeface="+mn-ea"/>
           <a:cs typeface="+mn-cs"/>
         </a:defRPr>
@@ -4077,7 +4077,7 @@
           <a:solidFill>
             <a:schemeClr val="tx1"/>
           </a:solidFill>
-          <a:latin typeface="+mn-lt"/>
+          <a:latin typeface="Poppins"/>
           <a:ea typeface="+mn-ea"/>
           <a:cs typeface="+mn-cs"/>
         </a:defRPr>
@@ -4092,7 +4092,7 @@
           <a:solidFill>
             <a:schemeClr val="tx1"/>
           </a:solidFill>
-          <a:latin typeface="+mn-lt"/>
+          <a:latin typeface="Poppins"/>
           <a:ea typeface="+mn-ea"/>
           <a:cs typeface="+mn-cs"/>
         </a:defRPr>
@@ -4107,7 +4107,7 @@
           <a:solidFill>
             <a:schemeClr val="tx1"/>
           </a:solidFill>
-          <a:latin typeface="+mn-lt"/>
+          <a:latin typeface="Poppins"/>
           <a:ea typeface="+mn-ea"/>
           <a:cs typeface="+mn-cs"/>
         </a:defRPr>
@@ -4122,7 +4122,7 @@
           <a:solidFill>
             <a:schemeClr val="tx1"/>
           </a:solidFill>
-          <a:latin typeface="+mn-lt"/>
+          <a:latin typeface="Poppins"/>
           <a:ea typeface="+mn-ea"/>
           <a:cs typeface="+mn-cs"/>
         </a:defRPr>
@@ -4137,7 +4137,7 @@
           <a:solidFill>
             <a:schemeClr val="tx1"/>
           </a:solidFill>
-          <a:latin typeface="+mn-lt"/>
+          <a:latin typeface="Poppins"/>
           <a:ea typeface="+mn-ea"/>
           <a:cs typeface="+mn-cs"/>
         </a:defRPr>
@@ -4152,7 +4152,7 @@
           <a:solidFill>
             <a:schemeClr val="tx1"/>
           </a:solidFill>
-          <a:latin typeface="+mn-lt"/>
+          <a:latin typeface="Poppins"/>
           <a:ea typeface="+mn-ea"/>
           <a:cs typeface="+mn-cs"/>
         </a:defRPr>
@@ -4162,7 +4162,7 @@
           <a:solidFill>
             <a:schemeClr val="tx1"/>
           </a:solidFill>
-          <a:latin typeface="+mn-lt"/>
+          <a:latin typeface="Poppins"/>
           <a:ea typeface="+mn-ea"/>
           <a:cs typeface="+mn-cs"/>
         </a:defRPr>
@@ -4172,7 +4172,7 @@
           <a:solidFill>
             <a:schemeClr val="tx1"/>
           </a:solidFill>
-          <a:latin typeface="+mn-lt"/>
+          <a:latin typeface="Poppins"/>
           <a:ea typeface="+mn-ea"/>
           <a:cs typeface="+mn-cs"/>
         </a:defRPr>
@@ -4182,7 +4182,7 @@
           <a:solidFill>
             <a:schemeClr val="tx1"/>
           </a:solidFill>
-          <a:latin typeface="+mn-lt"/>
+          <a:latin typeface="Poppins"/>
           <a:ea typeface="+mn-ea"/>
           <a:cs typeface="+mn-cs"/>
         </a:defRPr>
@@ -4192,7 +4192,7 @@
           <a:solidFill>
             <a:schemeClr val="tx1"/>
           </a:solidFill>
-          <a:latin typeface="+mn-lt"/>
+          <a:latin typeface="Poppins"/>
           <a:ea typeface="+mn-ea"/>
           <a:cs typeface="+mn-cs"/>
         </a:defRPr>
@@ -4202,7 +4202,7 @@
           <a:solidFill>
             <a:schemeClr val="tx1"/>
           </a:solidFill>
-          <a:latin typeface="+mn-lt"/>
+          <a:latin typeface="Poppins"/>
           <a:ea typeface="+mn-ea"/>
           <a:cs typeface="+mn-cs"/>
         </a:defRPr>
@@ -4212,7 +4212,7 @@
           <a:solidFill>
             <a:schemeClr val="tx1"/>
           </a:solidFill>
-          <a:latin typeface="+mn-lt"/>
+          <a:latin typeface="Poppins"/>
           <a:ea typeface="+mn-ea"/>
           <a:cs typeface="+mn-cs"/>
         </a:defRPr>
@@ -4222,7 +4222,7 @@
           <a:solidFill>
             <a:schemeClr val="tx1"/>
           </a:solidFill>
-          <a:latin typeface="+mn-lt"/>
+          <a:latin typeface="Poppins"/>
           <a:ea typeface="+mn-ea"/>
           <a:cs typeface="+mn-cs"/>
         </a:defRPr>
@@ -4232,7 +4232,7 @@
           <a:solidFill>
             <a:schemeClr val="tx1"/>
           </a:solidFill>
-          <a:latin typeface="+mn-lt"/>
+          <a:latin typeface="Poppins"/>
           <a:ea typeface="+mn-ea"/>
           <a:cs typeface="+mn-cs"/>
         </a:defRPr>
@@ -4318,13 +4318,52 @@
           <a:p>
             <a:pPr algn="ctr">
               <a:defRPr sz="900">
-                <a:solidFill>
-                  <a:srgbClr val="404040"/>
-                </a:solidFill>
+                <a:solidFill>val="45586A"/&gt;</a:solidFill>
               </a:defRPr>
             </a:pPr>
             <a:r>
               <a:t>Cours RD 01  •  Diapositive 1/10</a:t>
+            </a:r>
+          </a:p>
+        </p:txBody>
+      </p:sp>
+      <p:sp>
+        <p:nvSpPr>
+          <p:cNvPr id="990001" name="Pied de page FLE"/>
+          <p:cNvSpPr>
+            <a:spLocks noGrp="1"/>
+          </p:cNvSpPr>
+          <p:nvPr/>
+        </p:nvSpPr>
+        <p:spPr>
+          <a:xfrm>
+            <a:off x="3611880" y="-137160"/>
+            <a:ext cx="4572000" cy="274320"/>
+          </a:xfrm>
+          <a:prstGeom prst="rect">
+            <a:avLst/>
+          </a:prstGeom>
+        </p:spPr>
+        <p:txBody>
+          <a:bodyPr anchor="b"/>
+          <a:lstStyle/>
+          <a:p>
+            <a:pPr algn="r">
+              <a:defRPr sz="900">
+                <a:solidFill>
+                  <a:srgbClr val="9AA7B6"/>
+                </a:solidFill>
+                <a:latin typeface="Poppins"/>
+              </a:defRPr>
+            </a:pPr>
+            <a:r>
+              <a:rPr lang="fr-FR" sz="900">
+                <a:solidFill>
+                  <a:srgbClr val="9AA7B6"/>
+                </a:solidFill>
+                <a:latin typeface="Poppins"/>
+              </a:rPr>
+              <a:t>Université de Mostaganem — Dr. Madani BELACEL</a:t>
             </a:r>
           </a:p>
         </p:txBody>
@@ -4443,9 +4482,7 @@
           <a:p>
             <a:pPr algn="ctr">
               <a:defRPr sz="900">
-                <a:solidFill>
-                  <a:srgbClr val="404040"/>
-                </a:solidFill>
+                <a:solidFill>val="45586A"/&gt;</a:solidFill>
               </a:defRPr>
             </a:pPr>
             <a:r>
@@ -4478,6 +4515,47 @@
           </a:prstGeom>
         </p:spPr>
       </p:pic>
+      <p:sp>
+        <p:nvSpPr>
+          <p:cNvPr id="990001" name="Pied de page FLE"/>
+          <p:cNvSpPr>
+            <a:spLocks noGrp="1"/>
+          </p:cNvSpPr>
+          <p:nvPr/>
+        </p:nvSpPr>
+        <p:spPr>
+          <a:xfrm>
+            <a:off x="3611880" y="-137160"/>
+            <a:ext cx="4572000" cy="274320"/>
+          </a:xfrm>
+          <a:prstGeom prst="rect">
+            <a:avLst/>
+          </a:prstGeom>
+        </p:spPr>
+        <p:txBody>
+          <a:bodyPr anchor="b"/>
+          <a:lstStyle/>
+          <a:p>
+            <a:pPr algn="r">
+              <a:defRPr sz="900">
+                <a:solidFill>
+                  <a:srgbClr val="9AA7B6"/>
+                </a:solidFill>
+                <a:latin typeface="Poppins"/>
+              </a:defRPr>
+            </a:pPr>
+            <a:r>
+              <a:rPr lang="fr-FR" sz="900">
+                <a:solidFill>
+                  <a:srgbClr val="9AA7B6"/>
+                </a:solidFill>
+                <a:latin typeface="Poppins"/>
+              </a:rPr>
+              <a:t>Université de Mostaganem — Dr. Madani BELACEL</a:t>
+            </a:r>
+          </a:p>
+        </p:txBody>
+      </p:sp>
     </p:spTree>
   </p:cSld>
   <p:clrMapOvr>
@@ -4592,9 +4670,7 @@
           <a:p>
             <a:pPr algn="ctr">
               <a:defRPr sz="900">
-                <a:solidFill>
-                  <a:srgbClr val="404040"/>
-                </a:solidFill>
+                <a:solidFill>val="45586A"/&gt;</a:solidFill>
               </a:defRPr>
             </a:pPr>
             <a:r>
@@ -4627,6 +4703,47 @@
           </a:prstGeom>
         </p:spPr>
       </p:pic>
+      <p:sp>
+        <p:nvSpPr>
+          <p:cNvPr id="990001" name="Pied de page FLE"/>
+          <p:cNvSpPr>
+            <a:spLocks noGrp="1"/>
+          </p:cNvSpPr>
+          <p:nvPr/>
+        </p:nvSpPr>
+        <p:spPr>
+          <a:xfrm>
+            <a:off x="3611880" y="-137160"/>
+            <a:ext cx="4572000" cy="274320"/>
+          </a:xfrm>
+          <a:prstGeom prst="rect">
+            <a:avLst/>
+          </a:prstGeom>
+        </p:spPr>
+        <p:txBody>
+          <a:bodyPr anchor="b"/>
+          <a:lstStyle/>
+          <a:p>
+            <a:pPr algn="r">
+              <a:defRPr sz="900">
+                <a:solidFill>
+                  <a:srgbClr val="9AA7B6"/>
+                </a:solidFill>
+                <a:latin typeface="Poppins"/>
+              </a:defRPr>
+            </a:pPr>
+            <a:r>
+              <a:rPr lang="fr-FR" sz="900">
+                <a:solidFill>
+                  <a:srgbClr val="9AA7B6"/>
+                </a:solidFill>
+                <a:latin typeface="Poppins"/>
+              </a:rPr>
+              <a:t>Université de Mostaganem — Dr. Madani BELACEL</a:t>
+            </a:r>
+          </a:p>
+        </p:txBody>
+      </p:sp>
     </p:spTree>
   </p:cSld>
   <p:clrMapOvr>
@@ -4749,13 +4866,52 @@
           <a:p>
             <a:pPr algn="ctr">
               <a:defRPr sz="900">
-                <a:solidFill>
-                  <a:srgbClr val="404040"/>
-                </a:solidFill>
+                <a:solidFill>val="45586A"/&gt;</a:solidFill>
               </a:defRPr>
             </a:pPr>
             <a:r>
               <a:t>Cours RD 01  •  Diapositive 3/10</a:t>
+            </a:r>
+          </a:p>
+        </p:txBody>
+      </p:sp>
+      <p:sp>
+        <p:nvSpPr>
+          <p:cNvPr id="990001" name="Pied de page FLE"/>
+          <p:cNvSpPr>
+            <a:spLocks noGrp="1"/>
+          </p:cNvSpPr>
+          <p:nvPr/>
+        </p:nvSpPr>
+        <p:spPr>
+          <a:xfrm>
+            <a:off x="3611880" y="-137160"/>
+            <a:ext cx="4572000" cy="274320"/>
+          </a:xfrm>
+          <a:prstGeom prst="rect">
+            <a:avLst/>
+          </a:prstGeom>
+        </p:spPr>
+        <p:txBody>
+          <a:bodyPr anchor="b"/>
+          <a:lstStyle/>
+          <a:p>
+            <a:pPr algn="r">
+              <a:defRPr sz="900">
+                <a:solidFill>
+                  <a:srgbClr val="9AA7B6"/>
+                </a:solidFill>
+                <a:latin typeface="Poppins"/>
+              </a:defRPr>
+            </a:pPr>
+            <a:r>
+              <a:rPr lang="fr-FR" sz="900">
+                <a:solidFill>
+                  <a:srgbClr val="9AA7B6"/>
+                </a:solidFill>
+                <a:latin typeface="Poppins"/>
+              </a:rPr>
+              <a:t>Université de Mostaganem — Dr. Madani BELACEL</a:t>
             </a:r>
           </a:p>
         </p:txBody>
@@ -4874,9 +5030,7 @@
           <a:p>
             <a:pPr algn="ctr">
               <a:defRPr sz="900">
-                <a:solidFill>
-                  <a:srgbClr val="404040"/>
-                </a:solidFill>
+                <a:solidFill>val="45586A"/&gt;</a:solidFill>
               </a:defRPr>
             </a:pPr>
             <a:r>
@@ -4909,6 +5063,47 @@
           </a:prstGeom>
         </p:spPr>
       </p:pic>
+      <p:sp>
+        <p:nvSpPr>
+          <p:cNvPr id="990001" name="Pied de page FLE"/>
+          <p:cNvSpPr>
+            <a:spLocks noGrp="1"/>
+          </p:cNvSpPr>
+          <p:nvPr/>
+        </p:nvSpPr>
+        <p:spPr>
+          <a:xfrm>
+            <a:off x="3611880" y="-137160"/>
+            <a:ext cx="4572000" cy="274320"/>
+          </a:xfrm>
+          <a:prstGeom prst="rect">
+            <a:avLst/>
+          </a:prstGeom>
+        </p:spPr>
+        <p:txBody>
+          <a:bodyPr anchor="b"/>
+          <a:lstStyle/>
+          <a:p>
+            <a:pPr algn="r">
+              <a:defRPr sz="900">
+                <a:solidFill>
+                  <a:srgbClr val="9AA7B6"/>
+                </a:solidFill>
+                <a:latin typeface="Poppins"/>
+              </a:defRPr>
+            </a:pPr>
+            <a:r>
+              <a:rPr lang="fr-FR" sz="900">
+                <a:solidFill>
+                  <a:srgbClr val="9AA7B6"/>
+                </a:solidFill>
+                <a:latin typeface="Poppins"/>
+              </a:rPr>
+              <a:t>Université de Mostaganem — Dr. Madani BELACEL</a:t>
+            </a:r>
+          </a:p>
+        </p:txBody>
+      </p:sp>
     </p:spTree>
   </p:cSld>
   <p:clrMapOvr>
@@ -5023,13 +5218,52 @@
           <a:p>
             <a:pPr algn="ctr">
               <a:defRPr sz="900">
-                <a:solidFill>
-                  <a:srgbClr val="404040"/>
-                </a:solidFill>
+                <a:solidFill>val="45586A"/&gt;</a:solidFill>
               </a:defRPr>
             </a:pPr>
             <a:r>
               <a:t>Cours RD 01  •  Diapositive 5/10</a:t>
+            </a:r>
+          </a:p>
+        </p:txBody>
+      </p:sp>
+      <p:sp>
+        <p:nvSpPr>
+          <p:cNvPr id="990001" name="Pied de page FLE"/>
+          <p:cNvSpPr>
+            <a:spLocks noGrp="1"/>
+          </p:cNvSpPr>
+          <p:nvPr/>
+        </p:nvSpPr>
+        <p:spPr>
+          <a:xfrm>
+            <a:off x="3611880" y="-137160"/>
+            <a:ext cx="4572000" cy="274320"/>
+          </a:xfrm>
+          <a:prstGeom prst="rect">
+            <a:avLst/>
+          </a:prstGeom>
+        </p:spPr>
+        <p:txBody>
+          <a:bodyPr anchor="b"/>
+          <a:lstStyle/>
+          <a:p>
+            <a:pPr algn="r">
+              <a:defRPr sz="900">
+                <a:solidFill>
+                  <a:srgbClr val="9AA7B6"/>
+                </a:solidFill>
+                <a:latin typeface="Poppins"/>
+              </a:defRPr>
+            </a:pPr>
+            <a:r>
+              <a:rPr lang="fr-FR" sz="900">
+                <a:solidFill>
+                  <a:srgbClr val="9AA7B6"/>
+                </a:solidFill>
+                <a:latin typeface="Poppins"/>
+              </a:rPr>
+              <a:t>Université de Mostaganem — Dr. Madani BELACEL</a:t>
             </a:r>
           </a:p>
         </p:txBody>
@@ -5148,9 +5382,7 @@
           <a:p>
             <a:pPr algn="ctr">
               <a:defRPr sz="900">
-                <a:solidFill>
-                  <a:srgbClr val="404040"/>
-                </a:solidFill>
+                <a:solidFill>val="45586A"/&gt;</a:solidFill>
               </a:defRPr>
             </a:pPr>
             <a:r>
@@ -5183,6 +5415,47 @@
           </a:prstGeom>
         </p:spPr>
       </p:pic>
+      <p:sp>
+        <p:nvSpPr>
+          <p:cNvPr id="990001" name="Pied de page FLE"/>
+          <p:cNvSpPr>
+            <a:spLocks noGrp="1"/>
+          </p:cNvSpPr>
+          <p:nvPr/>
+        </p:nvSpPr>
+        <p:spPr>
+          <a:xfrm>
+            <a:off x="3611880" y="-137160"/>
+            <a:ext cx="4572000" cy="274320"/>
+          </a:xfrm>
+          <a:prstGeom prst="rect">
+            <a:avLst/>
+          </a:prstGeom>
+        </p:spPr>
+        <p:txBody>
+          <a:bodyPr anchor="b"/>
+          <a:lstStyle/>
+          <a:p>
+            <a:pPr algn="r">
+              <a:defRPr sz="900">
+                <a:solidFill>
+                  <a:srgbClr val="9AA7B6"/>
+                </a:solidFill>
+                <a:latin typeface="Poppins"/>
+              </a:defRPr>
+            </a:pPr>
+            <a:r>
+              <a:rPr lang="fr-FR" sz="900">
+                <a:solidFill>
+                  <a:srgbClr val="9AA7B6"/>
+                </a:solidFill>
+                <a:latin typeface="Poppins"/>
+              </a:rPr>
+              <a:t>Université de Mostaganem — Dr. Madani BELACEL</a:t>
+            </a:r>
+          </a:p>
+        </p:txBody>
+      </p:sp>
     </p:spTree>
   </p:cSld>
   <p:clrMapOvr>
@@ -5297,13 +5570,52 @@
           <a:p>
             <a:pPr algn="ctr">
               <a:defRPr sz="900">
-                <a:solidFill>
-                  <a:srgbClr val="404040"/>
-                </a:solidFill>
+                <a:solidFill>val="45586A"/&gt;</a:solidFill>
               </a:defRPr>
             </a:pPr>
             <a:r>
               <a:t>Cours RD 01  •  Diapositive 7/10</a:t>
+            </a:r>
+          </a:p>
+        </p:txBody>
+      </p:sp>
+      <p:sp>
+        <p:nvSpPr>
+          <p:cNvPr id="990001" name="Pied de page FLE"/>
+          <p:cNvSpPr>
+            <a:spLocks noGrp="1"/>
+          </p:cNvSpPr>
+          <p:nvPr/>
+        </p:nvSpPr>
+        <p:spPr>
+          <a:xfrm>
+            <a:off x="3611880" y="-137160"/>
+            <a:ext cx="4572000" cy="274320"/>
+          </a:xfrm>
+          <a:prstGeom prst="rect">
+            <a:avLst/>
+          </a:prstGeom>
+        </p:spPr>
+        <p:txBody>
+          <a:bodyPr anchor="b"/>
+          <a:lstStyle/>
+          <a:p>
+            <a:pPr algn="r">
+              <a:defRPr sz="900">
+                <a:solidFill>
+                  <a:srgbClr val="9AA7B6"/>
+                </a:solidFill>
+                <a:latin typeface="Poppins"/>
+              </a:defRPr>
+            </a:pPr>
+            <a:r>
+              <a:rPr lang="fr-FR" sz="900">
+                <a:solidFill>
+                  <a:srgbClr val="9AA7B6"/>
+                </a:solidFill>
+                <a:latin typeface="Poppins"/>
+              </a:rPr>
+              <a:t>Université de Mostaganem — Dr. Madani BELACEL</a:t>
             </a:r>
           </a:p>
         </p:txBody>
@@ -5422,9 +5734,7 @@
           <a:p>
             <a:pPr algn="ctr">
               <a:defRPr sz="900">
-                <a:solidFill>
-                  <a:srgbClr val="404040"/>
-                </a:solidFill>
+                <a:solidFill>val="45586A"/&gt;</a:solidFill>
               </a:defRPr>
             </a:pPr>
             <a:r>
@@ -5457,6 +5767,47 @@
           </a:prstGeom>
         </p:spPr>
       </p:pic>
+      <p:sp>
+        <p:nvSpPr>
+          <p:cNvPr id="990001" name="Pied de page FLE"/>
+          <p:cNvSpPr>
+            <a:spLocks noGrp="1"/>
+          </p:cNvSpPr>
+          <p:nvPr/>
+        </p:nvSpPr>
+        <p:spPr>
+          <a:xfrm>
+            <a:off x="3611880" y="-137160"/>
+            <a:ext cx="4572000" cy="274320"/>
+          </a:xfrm>
+          <a:prstGeom prst="rect">
+            <a:avLst/>
+          </a:prstGeom>
+        </p:spPr>
+        <p:txBody>
+          <a:bodyPr anchor="b"/>
+          <a:lstStyle/>
+          <a:p>
+            <a:pPr algn="r">
+              <a:defRPr sz="900">
+                <a:solidFill>
+                  <a:srgbClr val="9AA7B6"/>
+                </a:solidFill>
+                <a:latin typeface="Poppins"/>
+              </a:defRPr>
+            </a:pPr>
+            <a:r>
+              <a:rPr lang="fr-FR" sz="900">
+                <a:solidFill>
+                  <a:srgbClr val="9AA7B6"/>
+                </a:solidFill>
+                <a:latin typeface="Poppins"/>
+              </a:rPr>
+              <a:t>Université de Mostaganem — Dr. Madani BELACEL</a:t>
+            </a:r>
+          </a:p>
+        </p:txBody>
+      </p:sp>
     </p:spTree>
   </p:cSld>
   <p:clrMapOvr>
@@ -5571,13 +5922,52 @@
           <a:p>
             <a:pPr algn="ctr">
               <a:defRPr sz="900">
-                <a:solidFill>
-                  <a:srgbClr val="404040"/>
-                </a:solidFill>
+                <a:solidFill>val="45586A"/&gt;</a:solidFill>
               </a:defRPr>
             </a:pPr>
             <a:r>
               <a:t>Cours RD 01  •  Diapositive 9/10</a:t>
+            </a:r>
+          </a:p>
+        </p:txBody>
+      </p:sp>
+      <p:sp>
+        <p:nvSpPr>
+          <p:cNvPr id="990001" name="Pied de page FLE"/>
+          <p:cNvSpPr>
+            <a:spLocks noGrp="1"/>
+          </p:cNvSpPr>
+          <p:nvPr/>
+        </p:nvSpPr>
+        <p:spPr>
+          <a:xfrm>
+            <a:off x="3611880" y="-137160"/>
+            <a:ext cx="4572000" cy="274320"/>
+          </a:xfrm>
+          <a:prstGeom prst="rect">
+            <a:avLst/>
+          </a:prstGeom>
+        </p:spPr>
+        <p:txBody>
+          <a:bodyPr anchor="b"/>
+          <a:lstStyle/>
+          <a:p>
+            <a:pPr algn="r">
+              <a:defRPr sz="900">
+                <a:solidFill>
+                  <a:srgbClr val="9AA7B6"/>
+                </a:solidFill>
+                <a:latin typeface="Poppins"/>
+              </a:defRPr>
+            </a:pPr>
+            <a:r>
+              <a:rPr lang="fr-FR" sz="900">
+                <a:solidFill>
+                  <a:srgbClr val="9AA7B6"/>
+                </a:solidFill>
+                <a:latin typeface="Poppins"/>
+              </a:rPr>
+              <a:t>Université de Mostaganem — Dr. Madani BELACEL</a:t>
             </a:r>
           </a:p>
         </p:txBody>
@@ -5636,7 +6026,7 @@
     </a:clrScheme>
     <a:fontScheme name="Office">
       <a:majorFont>
-        <a:latin typeface="Calibri"/>
+        <a:latin typeface="Poppins"/>
         <a:ea typeface=""/>
         <a:cs typeface=""/>
         <a:font script="Jpan" typeface="ＭＳ Ｐゴシック"/>
@@ -5671,7 +6061,7 @@
         <a:font script="Geor" typeface="Sylfaen"/>
       </a:majorFont>
       <a:minorFont>
-        <a:latin typeface="Calibri"/>
+        <a:latin typeface="Poppins"/>
         <a:ea typeface=""/>
         <a:cs typeface=""/>
         <a:font script="Jpan" typeface="ＭＳ Ｐゴシック"/>
@@ -5956,7 +6346,7 @@
     </a:clrScheme>
     <a:fontScheme name="Office">
       <a:majorFont>
-        <a:latin typeface="Calibri"/>
+        <a:latin typeface="Poppins"/>
         <a:ea typeface=""/>
         <a:cs typeface=""/>
         <a:font script="Jpan" typeface="ＭＳ Ｐゴシック"/>
@@ -5991,7 +6381,7 @@
         <a:font script="Geor" typeface="Sylfaen"/>
       </a:majorFont>
       <a:minorFont>
-        <a:latin typeface="Calibri"/>
+        <a:latin typeface="Poppins"/>
         <a:ea typeface=""/>
         <a:cs typeface=""/>
         <a:font script="Jpan" typeface="ＭＳ Ｐゴシック"/>
